--- a/docs/regulatory/13_第2回会議資料_20260901反映版.pptx
+++ b/docs/regulatory/13_第2回会議資料_20260901反映版.pptx
@@ -2985,7 +2985,7 @@
                 <a:ea typeface="Yu Gothic" pitchFamily="34" charset="-122"/>
                 <a:cs typeface="Yu Gothic" pitchFamily="34" charset="-120"/>
               </a:rPr>
-              <a:t>ゲームコンテンツ化　</a:t>
+              <a:t>ゲーミフィケーション　</a:t>
             </a:r>
             <a:pPr indent="0" marL="0">
               <a:lnSpc>
@@ -3002,7 +3002,7 @@
                 <a:ea typeface="Yu Gothic" pitchFamily="34" charset="-122"/>
                 <a:cs typeface="Yu Gothic" pitchFamily="34" charset="-120"/>
               </a:rPr>
-              <a:t>継続的な行動変容支援。単調な訓練を熱中できる体験に変え、継続率を高める</a:t>
+              <a:t>訓練の習慣化支援。単調な訓練を熱中できる体験に変え、継続率を高める（「行動変容」は通知のなお書きの類型を自称することになるため主張しない）</a:t>
             </a:r>
             <a:endParaRPr lang="en-US" sz="1300" dirty="0"/>
           </a:p>
